--- a/slides/module_2_academic_research.pptx
+++ b/slides/module_2_academic_research.pptx
@@ -13153,7 +13153,7 @@
                 <a:ea typeface="Nimbus Sans"/>
                 <a:cs typeface="Nimbus Sans"/>
               </a:rPr>
-              <a:t>PAREJAS</a:t>
+              <a:t>INDIVIDUAL</a:t>
             </a:r>
           </a:p>
         </p:txBody>
